--- a/data-eng/decks/w2d1s1.pptx
+++ b/data-eng/decks/w2d1s1.pptx
@@ -5590,7 +5590,7 @@
                 <a:ea typeface="Pretendard"/>
                 <a:cs typeface="Pretendard"/>
               </a:rPr>
-              <a:t>Docker Desktop 이 실행 중인 터미널</a:t>
+              <a:t>「실습점검」 — Docker · 3306 · 이미지</a:t>
             </a:r>
           </a:p>
         </p:txBody>

--- a/data-eng/decks/w2d1s1.pptx
+++ b/data-eng/decks/w2d1s1.pptx
@@ -5246,7 +5246,7 @@
                 <a:ea typeface="Pretendard"/>
                 <a:cs typeface="Pretendard"/>
               </a:rPr>
-              <a:t>로그에서 ready for connections 확인</a:t>
+              <a:t>로그에서 ready … port: 3306 확인</a:t>
             </a:r>
           </a:p>
         </p:txBody>
@@ -14677,7 +14677,7 @@
                 <a:ea typeface="Pretendard"/>
                 <a:cs typeface="Pretendard"/>
               </a:rPr>
-              <a:t>포트 매핑이 없으면 Can't connect</a:t>
+              <a:t>3306 을 다른 MySQL 이 잡으면 그쪽으로 간다</a:t>
             </a:r>
           </a:p>
         </p:txBody>

--- a/data-eng/decks/w2d1s1.pptx
+++ b/data-eng/decks/w2d1s1.pptx
@@ -3100,7 +3100,7 @@
       <p:grpSpPr/>
       <p:sp>
         <p:nvSpPr>
-          <p:cNvPr id="2" name="Oval 1"/>
+          <p:cNvPr id="2" name="deckgen:decor"/>
           <p:cNvSpPr/>
           <p:nvPr/>
         </p:nvSpPr>
@@ -3130,7 +3130,7 @@
       </p:sp>
       <p:sp>
         <p:nvSpPr>
-          <p:cNvPr id="3" name="Oval 2"/>
+          <p:cNvPr id="3" name="deckgen:decor"/>
           <p:cNvSpPr/>
           <p:nvPr/>
         </p:nvSpPr>
@@ -3160,7 +3160,7 @@
       </p:sp>
       <p:sp>
         <p:nvSpPr>
-          <p:cNvPr id="4" name="Oval 3"/>
+          <p:cNvPr id="4" name="deckgen:decor"/>
           <p:cNvSpPr/>
           <p:nvPr/>
         </p:nvSpPr>
@@ -3190,7 +3190,7 @@
       </p:sp>
       <p:sp>
         <p:nvSpPr>
-          <p:cNvPr id="5" name="Rectangle 4"/>
+          <p:cNvPr id="5" name="deckgen:decor"/>
           <p:cNvSpPr/>
           <p:nvPr/>
         </p:nvSpPr>
@@ -3220,7 +3220,7 @@
       </p:sp>
       <p:sp>
         <p:nvSpPr>
-          <p:cNvPr id="6" name="Oval 5"/>
+          <p:cNvPr id="6" name="deckgen:decor"/>
           <p:cNvSpPr/>
           <p:nvPr/>
         </p:nvSpPr>
@@ -3250,7 +3250,7 @@
       </p:sp>
       <p:sp>
         <p:nvSpPr>
-          <p:cNvPr id="7" name="Oval 6"/>
+          <p:cNvPr id="7" name="deckgen:decor"/>
           <p:cNvSpPr/>
           <p:nvPr/>
         </p:nvSpPr>
@@ -3280,7 +3280,7 @@
       </p:sp>
       <p:sp>
         <p:nvSpPr>
-          <p:cNvPr id="8" name="Oval 7"/>
+          <p:cNvPr id="8" name="deckgen:decor"/>
           <p:cNvSpPr/>
           <p:nvPr/>
         </p:nvSpPr>
@@ -3310,7 +3310,7 @@
       </p:sp>
       <p:sp>
         <p:nvSpPr>
-          <p:cNvPr id="9" name="Oval 8"/>
+          <p:cNvPr id="9" name="deckgen:decor"/>
           <p:cNvSpPr/>
           <p:nvPr/>
         </p:nvSpPr>
@@ -3340,7 +3340,7 @@
       </p:sp>
       <p:sp>
         <p:nvSpPr>
-          <p:cNvPr id="10" name="Rectangle 9"/>
+          <p:cNvPr id="10" name="deckgen:decor"/>
           <p:cNvSpPr/>
           <p:nvPr/>
         </p:nvSpPr>
@@ -3434,7 +3434,7 @@
                 <a:ea typeface="Pretendard"/>
                 <a:cs typeface="Pretendard"/>
               </a:rPr>
-              <a:t>2-1 · MySQL 8.0 설치 및 기초 쿼리 · 이론 1H</a:t>
+              <a:t>2-1 · MySQL 9.7 설치 및 기초 쿼리 · 이론 1H</a:t>
             </a:r>
           </a:p>
         </p:txBody>
@@ -3475,7 +3475,7 @@
                 <a:ea typeface="Pretendard"/>
                 <a:cs typeface="Pretendard"/>
               </a:rPr>
-              <a:t>관계형 데이터베이스와 MySQL 8.0 개요</a:t>
+              <a:t>관계형 데이터베이스와 MySQL 9.7 개요</a:t>
             </a:r>
           </a:p>
         </p:txBody>
@@ -3600,7 +3600,7 @@
       <p:grpSpPr/>
       <p:sp>
         <p:nvSpPr>
-          <p:cNvPr id="2" name="Oval 1"/>
+          <p:cNvPr id="2" name="deckgen:decor"/>
           <p:cNvSpPr/>
           <p:nvPr/>
         </p:nvSpPr>
@@ -3630,7 +3630,7 @@
       </p:sp>
       <p:sp>
         <p:nvSpPr>
-          <p:cNvPr id="3" name="Oval 2"/>
+          <p:cNvPr id="3" name="deckgen:decor"/>
           <p:cNvSpPr/>
           <p:nvPr/>
         </p:nvSpPr>
@@ -3660,7 +3660,7 @@
       </p:sp>
       <p:sp>
         <p:nvSpPr>
-          <p:cNvPr id="4" name="Oval 3"/>
+          <p:cNvPr id="4" name="deckgen:decor"/>
           <p:cNvSpPr/>
           <p:nvPr/>
         </p:nvSpPr>
@@ -4808,7 +4808,7 @@
       <p:grpSpPr/>
       <p:sp>
         <p:nvSpPr>
-          <p:cNvPr id="2" name="Oval 1"/>
+          <p:cNvPr id="2" name="deckgen:decor"/>
           <p:cNvSpPr/>
           <p:nvPr/>
         </p:nvSpPr>
@@ -4838,7 +4838,7 @@
       </p:sp>
       <p:sp>
         <p:nvSpPr>
-          <p:cNvPr id="3" name="Oval 2"/>
+          <p:cNvPr id="3" name="deckgen:decor"/>
           <p:cNvSpPr/>
           <p:nvPr/>
         </p:nvSpPr>
@@ -4973,7 +4973,7 @@
                 <a:ea typeface="Pretendard"/>
                 <a:cs typeface="Pretendard"/>
               </a:rPr>
-              <a:t>다음은 Docker 로 MySQL 8.0 기동과 접속 (1H)</a:t>
+              <a:t>다음은 Docker 로 MySQL 9.7 기동과 접속 (1H)</a:t>
             </a:r>
           </a:p>
         </p:txBody>
@@ -5130,7 +5130,7 @@
                 <a:ea typeface="Pretendard"/>
                 <a:cs typeface="Pretendard"/>
               </a:rPr>
-              <a:t>docker run 으로 mysql:8.0 기동</a:t>
+              <a:t>docker run 으로 mysql:9.7 기동</a:t>
             </a:r>
           </a:p>
         </p:txBody>
@@ -5615,7 +5615,7 @@
       <p:grpSpPr/>
       <p:sp>
         <p:nvSpPr>
-          <p:cNvPr id="2" name="Oval 1"/>
+          <p:cNvPr id="2" name="deckgen:decor"/>
           <p:cNvSpPr/>
           <p:nvPr/>
         </p:nvSpPr>
@@ -5645,7 +5645,7 @@
       </p:sp>
       <p:sp>
         <p:nvSpPr>
-          <p:cNvPr id="3" name="Oval 2"/>
+          <p:cNvPr id="3" name="deckgen:decor"/>
           <p:cNvSpPr/>
           <p:nvPr/>
         </p:nvSpPr>
@@ -5675,7 +5675,7 @@
       </p:sp>
       <p:sp>
         <p:nvSpPr>
-          <p:cNvPr id="4" name="Oval 3"/>
+          <p:cNvPr id="4" name="deckgen:decor"/>
           <p:cNvSpPr/>
           <p:nvPr/>
         </p:nvSpPr>
@@ -6606,7 +6606,7 @@
       <p:grpSpPr/>
       <p:sp>
         <p:nvSpPr>
-          <p:cNvPr id="2" name="Oval 1"/>
+          <p:cNvPr id="2" name="deckgen:decor"/>
           <p:cNvSpPr/>
           <p:nvPr/>
         </p:nvSpPr>
@@ -6636,7 +6636,7 @@
       </p:sp>
       <p:sp>
         <p:nvSpPr>
-          <p:cNvPr id="3" name="Oval 2"/>
+          <p:cNvPr id="3" name="deckgen:decor"/>
           <p:cNvSpPr/>
           <p:nvPr/>
         </p:nvSpPr>
@@ -6666,7 +6666,7 @@
       </p:sp>
       <p:sp>
         <p:nvSpPr>
-          <p:cNvPr id="4" name="Oval 3"/>
+          <p:cNvPr id="4" name="deckgen:decor"/>
           <p:cNvSpPr/>
           <p:nvPr/>
         </p:nvSpPr>
@@ -7800,7 +7800,7 @@
       <p:grpSpPr/>
       <p:sp>
         <p:nvSpPr>
-          <p:cNvPr id="2" name="Oval 1"/>
+          <p:cNvPr id="2" name="deckgen:decor"/>
           <p:cNvSpPr/>
           <p:nvPr/>
         </p:nvSpPr>
@@ -7830,7 +7830,7 @@
       </p:sp>
       <p:sp>
         <p:nvSpPr>
-          <p:cNvPr id="3" name="Oval 2"/>
+          <p:cNvPr id="3" name="deckgen:decor"/>
           <p:cNvSpPr/>
           <p:nvPr/>
         </p:nvSpPr>
@@ -7860,7 +7860,7 @@
       </p:sp>
       <p:sp>
         <p:nvSpPr>
-          <p:cNvPr id="4" name="Oval 3"/>
+          <p:cNvPr id="4" name="deckgen:decor"/>
           <p:cNvSpPr/>
           <p:nvPr/>
         </p:nvSpPr>
@@ -9511,7 +9511,7 @@
       <p:grpSpPr/>
       <p:sp>
         <p:nvSpPr>
-          <p:cNvPr id="2" name="Oval 1"/>
+          <p:cNvPr id="2" name="deckgen:decor"/>
           <p:cNvSpPr/>
           <p:nvPr/>
         </p:nvSpPr>
@@ -9541,7 +9541,7 @@
       </p:sp>
       <p:sp>
         <p:nvSpPr>
-          <p:cNvPr id="3" name="Oval 2"/>
+          <p:cNvPr id="3" name="deckgen:decor"/>
           <p:cNvSpPr/>
           <p:nvPr/>
         </p:nvSpPr>
@@ -9571,7 +9571,7 @@
       </p:sp>
       <p:sp>
         <p:nvSpPr>
-          <p:cNvPr id="4" name="Oval 3"/>
+          <p:cNvPr id="4" name="deckgen:decor"/>
           <p:cNvSpPr/>
           <p:nvPr/>
         </p:nvSpPr>
@@ -10707,7 +10707,7 @@
       <p:grpSpPr/>
       <p:sp>
         <p:nvSpPr>
-          <p:cNvPr id="2" name="Oval 1"/>
+          <p:cNvPr id="2" name="deckgen:decor"/>
           <p:cNvSpPr/>
           <p:nvPr/>
         </p:nvSpPr>
@@ -10737,7 +10737,7 @@
       </p:sp>
       <p:sp>
         <p:nvSpPr>
-          <p:cNvPr id="3" name="Oval 2"/>
+          <p:cNvPr id="3" name="deckgen:decor"/>
           <p:cNvSpPr/>
           <p:nvPr/>
         </p:nvSpPr>
@@ -10767,7 +10767,7 @@
       </p:sp>
       <p:sp>
         <p:nvSpPr>
-          <p:cNvPr id="4" name="Oval 3"/>
+          <p:cNvPr id="4" name="deckgen:decor"/>
           <p:cNvSpPr/>
           <p:nvPr/>
         </p:nvSpPr>
@@ -12868,7 +12868,7 @@
       <p:grpSpPr/>
       <p:sp>
         <p:nvSpPr>
-          <p:cNvPr id="2" name="Oval 1"/>
+          <p:cNvPr id="2" name="deckgen:decor"/>
           <p:cNvSpPr/>
           <p:nvPr/>
         </p:nvSpPr>
@@ -12898,7 +12898,7 @@
       </p:sp>
       <p:sp>
         <p:nvSpPr>
-          <p:cNvPr id="3" name="Oval 2"/>
+          <p:cNvPr id="3" name="deckgen:decor"/>
           <p:cNvSpPr/>
           <p:nvPr/>
         </p:nvSpPr>
@@ -12928,7 +12928,7 @@
       </p:sp>
       <p:sp>
         <p:nvSpPr>
-          <p:cNvPr id="4" name="Oval 3"/>
+          <p:cNvPr id="4" name="deckgen:decor"/>
           <p:cNvSpPr/>
           <p:nvPr/>
         </p:nvSpPr>
@@ -13895,7 +13895,7 @@
       <p:grpSpPr/>
       <p:sp>
         <p:nvSpPr>
-          <p:cNvPr id="2" name="Oval 1"/>
+          <p:cNvPr id="2" name="deckgen:decor"/>
           <p:cNvSpPr/>
           <p:nvPr/>
         </p:nvSpPr>
@@ -13925,7 +13925,7 @@
       </p:sp>
       <p:sp>
         <p:nvSpPr>
-          <p:cNvPr id="3" name="Oval 2"/>
+          <p:cNvPr id="3" name="deckgen:decor"/>
           <p:cNvSpPr/>
           <p:nvPr/>
         </p:nvSpPr>
@@ -13955,7 +13955,7 @@
       </p:sp>
       <p:sp>
         <p:nvSpPr>
-          <p:cNvPr id="4" name="Oval 3"/>
+          <p:cNvPr id="4" name="deckgen:decor"/>
           <p:cNvSpPr/>
           <p:nvPr/>
         </p:nvSpPr>
@@ -14956,7 +14956,7 @@
       <p:grpSpPr/>
       <p:sp>
         <p:nvSpPr>
-          <p:cNvPr id="2" name="Oval 1"/>
+          <p:cNvPr id="2" name="deckgen:decor"/>
           <p:cNvSpPr/>
           <p:nvPr/>
         </p:nvSpPr>
@@ -14986,7 +14986,7 @@
       </p:sp>
       <p:sp>
         <p:nvSpPr>
-          <p:cNvPr id="3" name="Oval 2"/>
+          <p:cNvPr id="3" name="deckgen:decor"/>
           <p:cNvSpPr/>
           <p:nvPr/>
         </p:nvSpPr>
@@ -15016,7 +15016,7 @@
       </p:sp>
       <p:sp>
         <p:nvSpPr>
-          <p:cNvPr id="4" name="Oval 3"/>
+          <p:cNvPr id="4" name="deckgen:decor"/>
           <p:cNvSpPr/>
           <p:nvPr/>
         </p:nvSpPr>
@@ -15222,7 +15222,7 @@
       </p:sp>
       <p:sp>
         <p:nvSpPr>
-          <p:cNvPr id="10" name="TextBox 9"/>
+          <p:cNvPr id="10" name="deckgen:ornament"/>
           <p:cNvSpPr txBox="1"/>
           <p:nvPr/>
         </p:nvSpPr>
@@ -15407,7 +15407,7 @@
       </p:sp>
       <p:sp>
         <p:nvSpPr>
-          <p:cNvPr id="14" name="TextBox 13"/>
+          <p:cNvPr id="14" name="deckgen:ornament"/>
           <p:cNvSpPr txBox="1"/>
           <p:nvPr/>
         </p:nvSpPr>
@@ -15592,7 +15592,7 @@
       </p:sp>
       <p:sp>
         <p:nvSpPr>
-          <p:cNvPr id="18" name="TextBox 17"/>
+          <p:cNvPr id="18" name="deckgen:ornament"/>
           <p:cNvSpPr txBox="1"/>
           <p:nvPr/>
         </p:nvSpPr>
